--- a/ai-diagram-slide.pptx
+++ b/ai-diagram-slide.pptx
@@ -511,7 +511,7 @@
           <a:p>
             <a:r>
               <a:rPr lang="en-US" dirty="0"/>
-              <a:t>1. You ask a question on your PC. It travels over the internet to a data center, and the answer comes back the same way.</a:t>
+              <a:t>1. You ask a chatbot a question on your phone or PC. It travels over the internet to a data center, and the answer comes back the same way.</a:t>
             </a:r>
           </a:p>
           <a:p>
@@ -563,6 +563,18 @@
             <a:r>
               <a:rPr lang="en-US" dirty="0"/>
               <a:t>Simplified: real water takes days to years to go around the cycle, and the rain does not fall back on the same data center.</a:t>
+            </a:r>
+          </a:p>
+          <a:p>
+            <a:r>
+              <a:rPr lang="en-US" dirty="0"/>
+              <a:t>About the cooling-tower photo: big round towers like this one are mostly at power plants. Data-center cooling towers are smaller boxes, but they work the same way: water evaporates and carries the heat away.</a:t>
+            </a:r>
+          </a:p>
+          <a:p>
+            <a:r>
+              <a:rPr lang="en-US" dirty="0"/>
+              <a:t>Photos: our team's pictures of a phone, server racks (behind the data center), a cooling tower and a desalination plant.</a:t>
             </a:r>
           </a:p>
         </p:txBody>
@@ -1100,38 +1112,9 @@
           </a:p>
         </p:txBody>
       </p:sp>
-      <p:sp>
-        <p:nvSpPr>
-          <p:cNvPr id="5" name="Shape 3"/>
-          <p:cNvSpPr/>
-          <p:nvPr/>
-        </p:nvSpPr>
-        <p:spPr>
-          <a:xfrm>
-            <a:off x="4526280" y="2240280"/>
-            <a:ext cx="4800600" cy="2880360"/>
-          </a:xfrm>
-          <a:prstGeom prst="roundRect">
-            <a:avLst>
-              <a:gd name="adj" fmla="val 5714"/>
-            </a:avLst>
-          </a:prstGeom>
-          <a:solidFill>
-            <a:srgbClr val="0B2239">
-              <a:alpha val="92000"/>
-            </a:srgbClr>
-          </a:solidFill>
-          <a:ln w="28575">
-            <a:solidFill>
-              <a:srgbClr val="C9D6E2"/>
-            </a:solidFill>
-            <a:prstDash val="solid"/>
-          </a:ln>
-        </p:spPr>
-      </p:sp>
       <p:pic>
         <p:nvPicPr>
-          <p:cNvPr id="6" name="Image 0" descr="preencoded.png">    </p:cNvPr>
+          <p:cNvPr id="5" name="Image 0" descr="preencoded.png">    </p:cNvPr>
           <p:cNvPicPr>
             <a:picLocks noChangeAspect="1"/>
           </p:cNvPicPr>
@@ -1145,6 +1128,54 @@
         </p:blipFill>
         <p:spPr>
           <a:xfrm>
+            <a:off x="4526280" y="2240280"/>
+            <a:ext cx="4800600" cy="2880360"/>
+          </a:xfrm>
+          <a:prstGeom prst="rect">
+            <a:avLst/>
+          </a:prstGeom>
+        </p:spPr>
+      </p:pic>
+      <p:sp>
+        <p:nvSpPr>
+          <p:cNvPr id="6" name="Shape 3"/>
+          <p:cNvSpPr/>
+          <p:nvPr/>
+        </p:nvSpPr>
+        <p:spPr>
+          <a:xfrm>
+            <a:off x="4526280" y="2240280"/>
+            <a:ext cx="4800600" cy="2880360"/>
+          </a:xfrm>
+          <a:prstGeom prst="roundRect">
+            <a:avLst>
+              <a:gd name="adj" fmla="val 5714"/>
+            </a:avLst>
+          </a:prstGeom>
+          <a:ln w="28575">
+            <a:solidFill>
+              <a:srgbClr val="C9D6E2"/>
+            </a:solidFill>
+            <a:prstDash val="solid"/>
+          </a:ln>
+        </p:spPr>
+      </p:sp>
+      <p:pic>
+        <p:nvPicPr>
+          <p:cNvPr id="7" name="Image 1" descr="preencoded.png">    </p:cNvPr>
+          <p:cNvPicPr>
+            <a:picLocks noChangeAspect="1"/>
+          </p:cNvPicPr>
+          <p:nvPr/>
+        </p:nvPicPr>
+        <p:blipFill>
+          <a:blip r:embed="rId3"/>
+          <a:stretch>
+            <a:fillRect/>
+          </a:stretch>
+        </p:blipFill>
+        <p:spPr>
+          <a:xfrm>
             <a:off x="4800600" y="2368296"/>
             <a:ext cx="329184" cy="329184"/>
           </a:xfrm>
@@ -1155,7 +1186,7 @@
       </p:pic>
       <p:sp>
         <p:nvSpPr>
-          <p:cNvPr id="7" name="label"/>
+          <p:cNvPr id="8" name="label"/>
           <p:cNvSpPr txBox="1"/>
           <p:nvPr/>
         </p:nvSpPr>
@@ -1194,7 +1225,7 @@
       </p:sp>
       <p:sp>
         <p:nvSpPr>
-          <p:cNvPr id="8" name="Shape 5"/>
+          <p:cNvPr id="9" name="Shape 5"/>
           <p:cNvSpPr/>
           <p:nvPr/>
         </p:nvSpPr>
@@ -1219,7 +1250,7 @@
       </p:sp>
       <p:sp>
         <p:nvSpPr>
-          <p:cNvPr id="9" name="caption-badge"/>
+          <p:cNvPr id="10" name="caption-badge"/>
           <p:cNvSpPr txBox="1"/>
           <p:nvPr/>
         </p:nvSpPr>
@@ -1258,7 +1289,7 @@
       </p:sp>
       <p:sp>
         <p:nvSpPr>
-          <p:cNvPr id="10" name="Shape 7"/>
+          <p:cNvPr id="11" name="Shape 7"/>
           <p:cNvSpPr/>
           <p:nvPr/>
         </p:nvSpPr>
@@ -1298,7 +1329,7 @@
       </p:sp>
       <p:sp>
         <p:nvSpPr>
-          <p:cNvPr id="11" name="Shape 8"/>
+          <p:cNvPr id="12" name="Shape 8"/>
           <p:cNvSpPr/>
           <p:nvPr/>
         </p:nvSpPr>
@@ -1338,7 +1369,7 @@
       </p:sp>
       <p:sp>
         <p:nvSpPr>
-          <p:cNvPr id="12" name="Shape 9"/>
+          <p:cNvPr id="13" name="Shape 9"/>
           <p:cNvSpPr/>
           <p:nvPr/>
         </p:nvSpPr>
@@ -1378,7 +1409,7 @@
       </p:sp>
       <p:sp>
         <p:nvSpPr>
-          <p:cNvPr id="13" name="Shape 10"/>
+          <p:cNvPr id="14" name="Shape 10"/>
           <p:cNvSpPr/>
           <p:nvPr/>
         </p:nvSpPr>
@@ -1418,7 +1449,7 @@
       </p:sp>
       <p:sp>
         <p:nvSpPr>
-          <p:cNvPr id="14" name="caption-loop"/>
+          <p:cNvPr id="15" name="caption-loop"/>
           <p:cNvSpPr txBox="1"/>
           <p:nvPr/>
         </p:nvSpPr>
@@ -1457,7 +1488,7 @@
       </p:sp>
       <p:sp>
         <p:nvSpPr>
-          <p:cNvPr id="15" name="Shape 12"/>
+          <p:cNvPr id="16" name="Shape 12"/>
           <p:cNvSpPr/>
           <p:nvPr/>
         </p:nvSpPr>
@@ -1484,14 +1515,14 @@
       </p:sp>
       <p:pic>
         <p:nvPicPr>
-          <p:cNvPr id="16" name="Image 1" descr="preencoded.png">    </p:cNvPr>
+          <p:cNvPr id="17" name="Image 2" descr="preencoded.png">    </p:cNvPr>
           <p:cNvPicPr>
             <a:picLocks noChangeAspect="1"/>
           </p:cNvPicPr>
           <p:nvPr/>
         </p:nvPicPr>
         <p:blipFill>
-          <a:blip r:embed="rId3"/>
+          <a:blip r:embed="rId4"/>
           <a:stretch>
             <a:fillRect/>
           </a:stretch>
@@ -1508,7 +1539,7 @@
       </p:pic>
       <p:sp>
         <p:nvSpPr>
-          <p:cNvPr id="17" name="label"/>
+          <p:cNvPr id="18" name="label"/>
           <p:cNvSpPr txBox="1"/>
           <p:nvPr/>
         </p:nvSpPr>
@@ -1547,7 +1578,7 @@
       </p:sp>
       <p:sp>
         <p:nvSpPr>
-          <p:cNvPr id="18" name="Shape 14"/>
+          <p:cNvPr id="19" name="Shape 14"/>
           <p:cNvSpPr/>
           <p:nvPr/>
         </p:nvSpPr>
@@ -1574,14 +1605,14 @@
       </p:sp>
       <p:pic>
         <p:nvPicPr>
-          <p:cNvPr id="19" name="Image 2" descr="preencoded.png">    </p:cNvPr>
+          <p:cNvPr id="20" name="Image 3" descr="preencoded.png">    </p:cNvPr>
           <p:cNvPicPr>
             <a:picLocks noChangeAspect="1"/>
           </p:cNvPicPr>
           <p:nvPr/>
         </p:nvPicPr>
         <p:blipFill>
-          <a:blip r:embed="rId4"/>
+          <a:blip r:embed="rId5"/>
           <a:stretch>
             <a:fillRect/>
           </a:stretch>
@@ -1598,7 +1629,7 @@
       </p:pic>
       <p:sp>
         <p:nvSpPr>
-          <p:cNvPr id="20" name="label"/>
+          <p:cNvPr id="21" name="label"/>
           <p:cNvSpPr txBox="1"/>
           <p:nvPr/>
         </p:nvSpPr>
@@ -1637,7 +1668,7 @@
       </p:sp>
       <p:sp>
         <p:nvSpPr>
-          <p:cNvPr id="21" name="Shape 16"/>
+          <p:cNvPr id="22" name="Shape 16"/>
           <p:cNvSpPr/>
           <p:nvPr/>
         </p:nvSpPr>
@@ -1664,14 +1695,14 @@
       </p:sp>
       <p:pic>
         <p:nvPicPr>
-          <p:cNvPr id="22" name="Image 3" descr="preencoded.png">    </p:cNvPr>
+          <p:cNvPr id="23" name="Image 4" descr="preencoded.png">    </p:cNvPr>
           <p:cNvPicPr>
             <a:picLocks noChangeAspect="1"/>
           </p:cNvPicPr>
           <p:nvPr/>
         </p:nvPicPr>
         <p:blipFill>
-          <a:blip r:embed="rId5"/>
+          <a:blip r:embed="rId6"/>
           <a:stretch>
             <a:fillRect/>
           </a:stretch>
@@ -1688,7 +1719,7 @@
       </p:pic>
       <p:sp>
         <p:nvSpPr>
-          <p:cNvPr id="23" name="label"/>
+          <p:cNvPr id="24" name="label"/>
           <p:cNvSpPr txBox="1"/>
           <p:nvPr/>
         </p:nvSpPr>
@@ -1727,7 +1758,7 @@
       </p:sp>
       <p:sp>
         <p:nvSpPr>
-          <p:cNvPr id="24" name="Shape 18"/>
+          <p:cNvPr id="25" name="Shape 18"/>
           <p:cNvSpPr/>
           <p:nvPr/>
         </p:nvSpPr>
@@ -1754,14 +1785,14 @@
       </p:sp>
       <p:pic>
         <p:nvPicPr>
-          <p:cNvPr id="25" name="Image 4" descr="preencoded.png">    </p:cNvPr>
+          <p:cNvPr id="26" name="Image 5" descr="preencoded.png">    </p:cNvPr>
           <p:cNvPicPr>
             <a:picLocks noChangeAspect="1"/>
           </p:cNvPicPr>
           <p:nvPr/>
         </p:nvPicPr>
         <p:blipFill>
-          <a:blip r:embed="rId6"/>
+          <a:blip r:embed="rId7"/>
           <a:stretch>
             <a:fillRect/>
           </a:stretch>
@@ -1778,7 +1809,7 @@
       </p:pic>
       <p:sp>
         <p:nvSpPr>
-          <p:cNvPr id="26" name="label"/>
+          <p:cNvPr id="27" name="label"/>
           <p:cNvSpPr txBox="1"/>
           <p:nvPr/>
         </p:nvSpPr>
@@ -1817,7 +1848,7 @@
       </p:sp>
       <p:sp>
         <p:nvSpPr>
-          <p:cNvPr id="27" name="Shape 20"/>
+          <p:cNvPr id="28" name="Shape 20"/>
           <p:cNvSpPr/>
           <p:nvPr/>
         </p:nvSpPr>
@@ -1842,7 +1873,7 @@
       </p:sp>
       <p:sp>
         <p:nvSpPr>
-          <p:cNvPr id="28" name="caption-badge"/>
+          <p:cNvPr id="29" name="caption-badge"/>
           <p:cNvSpPr txBox="1"/>
           <p:nvPr/>
         </p:nvSpPr>
@@ -1881,7 +1912,7 @@
       </p:sp>
       <p:sp>
         <p:nvSpPr>
-          <p:cNvPr id="29" name="Shape 22"/>
+          <p:cNvPr id="30" name="Shape 22"/>
           <p:cNvSpPr/>
           <p:nvPr/>
         </p:nvSpPr>
@@ -1906,7 +1937,7 @@
       </p:sp>
       <p:sp>
         <p:nvSpPr>
-          <p:cNvPr id="30" name="caption-badge"/>
+          <p:cNvPr id="31" name="caption-badge"/>
           <p:cNvSpPr txBox="1"/>
           <p:nvPr/>
         </p:nvSpPr>
@@ -1945,7 +1976,7 @@
       </p:sp>
       <p:sp>
         <p:nvSpPr>
-          <p:cNvPr id="31" name="Shape 24"/>
+          <p:cNvPr id="32" name="Shape 24"/>
           <p:cNvSpPr/>
           <p:nvPr/>
         </p:nvSpPr>
@@ -1970,7 +2001,7 @@
       </p:sp>
       <p:sp>
         <p:nvSpPr>
-          <p:cNvPr id="32" name="caption-badge"/>
+          <p:cNvPr id="33" name="caption-badge"/>
           <p:cNvSpPr txBox="1"/>
           <p:nvPr/>
         </p:nvSpPr>
@@ -2009,7 +2040,7 @@
       </p:sp>
       <p:sp>
         <p:nvSpPr>
-          <p:cNvPr id="33" name="Shape 26"/>
+          <p:cNvPr id="34" name="Shape 26"/>
           <p:cNvSpPr/>
           <p:nvPr/>
         </p:nvSpPr>
@@ -2038,14 +2069,14 @@
       </p:sp>
       <p:pic>
         <p:nvPicPr>
-          <p:cNvPr id="34" name="Image 5" descr="preencoded.png">    </p:cNvPr>
+          <p:cNvPr id="35" name="Image 6" descr="preencoded.png">    </p:cNvPr>
           <p:cNvPicPr>
             <a:picLocks noChangeAspect="1"/>
           </p:cNvPicPr>
           <p:nvPr/>
         </p:nvPicPr>
         <p:blipFill>
-          <a:blip r:embed="rId7"/>
+          <a:blip r:embed="rId8"/>
           <a:stretch>
             <a:fillRect/>
           </a:stretch>
@@ -2062,7 +2093,7 @@
       </p:pic>
       <p:sp>
         <p:nvSpPr>
-          <p:cNvPr id="35" name="label"/>
+          <p:cNvPr id="36" name="label"/>
           <p:cNvSpPr txBox="1"/>
           <p:nvPr/>
         </p:nvSpPr>
@@ -2101,7 +2132,7 @@
       </p:sp>
       <p:sp>
         <p:nvSpPr>
-          <p:cNvPr id="36" name="caption-sub"/>
+          <p:cNvPr id="37" name="caption-sub"/>
           <p:cNvSpPr txBox="1"/>
           <p:nvPr/>
         </p:nvSpPr>
@@ -2140,7 +2171,7 @@
       </p:sp>
       <p:sp>
         <p:nvSpPr>
-          <p:cNvPr id="37" name="Shape 29"/>
+          <p:cNvPr id="38" name="Shape 29"/>
           <p:cNvSpPr/>
           <p:nvPr/>
         </p:nvSpPr>
@@ -2169,14 +2200,14 @@
       </p:sp>
       <p:pic>
         <p:nvPicPr>
-          <p:cNvPr id="38" name="Image 6" descr="preencoded.png">    </p:cNvPr>
+          <p:cNvPr id="39" name="Image 7" descr="preencoded.png">    </p:cNvPr>
           <p:cNvPicPr>
             <a:picLocks noChangeAspect="1"/>
           </p:cNvPicPr>
           <p:nvPr/>
         </p:nvPicPr>
         <p:blipFill>
-          <a:blip r:embed="rId8"/>
+          <a:blip r:embed="rId9"/>
           <a:stretch>
             <a:fillRect/>
           </a:stretch>
@@ -2193,7 +2224,7 @@
       </p:pic>
       <p:sp>
         <p:nvSpPr>
-          <p:cNvPr id="39" name="label"/>
+          <p:cNvPr id="40" name="label"/>
           <p:cNvSpPr txBox="1"/>
           <p:nvPr/>
         </p:nvSpPr>
@@ -2232,7 +2263,7 @@
       </p:sp>
       <p:sp>
         <p:nvSpPr>
-          <p:cNvPr id="40" name="caption-sub"/>
+          <p:cNvPr id="41" name="caption-sub"/>
           <p:cNvSpPr txBox="1"/>
           <p:nvPr/>
         </p:nvSpPr>
@@ -2269,9 +2300,33 @@
           </a:p>
         </p:txBody>
       </p:sp>
-      <p:sp>
-        <p:nvSpPr>
-          <p:cNvPr id="41" name="Shape 32"/>
+      <p:pic>
+        <p:nvPicPr>
+          <p:cNvPr id="42" name="Image 8" descr="preencoded.png">    </p:cNvPr>
+          <p:cNvPicPr>
+            <a:picLocks noChangeAspect="1"/>
+          </p:cNvPicPr>
+          <p:nvPr/>
+        </p:nvPicPr>
+        <p:blipFill>
+          <a:blip r:embed="rId10"/>
+          <a:stretch>
+            <a:fillRect/>
+          </a:stretch>
+        </p:blipFill>
+        <p:spPr>
+          <a:xfrm>
+            <a:off x="2395728" y="2560320"/>
+            <a:ext cx="1600200" cy="1051560"/>
+          </a:xfrm>
+          <a:prstGeom prst="rect">
+            <a:avLst/>
+          </a:prstGeom>
+        </p:spPr>
+      </p:pic>
+      <p:sp>
+        <p:nvSpPr>
+          <p:cNvPr id="43" name="Shape 32"/>
           <p:cNvSpPr/>
           <p:nvPr/>
         </p:nvSpPr>
@@ -2285,11 +2340,6 @@
               <a:gd name="adj" fmla="val 10435"/>
             </a:avLst>
           </a:prstGeom>
-          <a:solidFill>
-            <a:srgbClr val="0E1B2A">
-              <a:alpha val="90000"/>
-            </a:srgbClr>
-          </a:solidFill>
           <a:ln w="19050">
             <a:solidFill>
               <a:srgbClr val="C9D6E2"/>
@@ -2298,39 +2348,15 @@
           </a:ln>
         </p:spPr>
       </p:sp>
-      <p:pic>
-        <p:nvPicPr>
-          <p:cNvPr id="42" name="Image 7" descr="preencoded.png">    </p:cNvPr>
-          <p:cNvPicPr>
-            <a:picLocks noChangeAspect="1"/>
-          </p:cNvPicPr>
-          <p:nvPr/>
-        </p:nvPicPr>
-        <p:blipFill>
-          <a:blip r:embed="rId9"/>
-          <a:stretch>
-            <a:fillRect/>
-          </a:stretch>
-        </p:blipFill>
-        <p:spPr>
-          <a:xfrm>
-            <a:off x="2985516" y="2651760"/>
-            <a:ext cx="420624" cy="420624"/>
-          </a:xfrm>
-          <a:prstGeom prst="rect">
-            <a:avLst/>
-          </a:prstGeom>
-        </p:spPr>
-      </p:pic>
-      <p:sp>
-        <p:nvSpPr>
-          <p:cNvPr id="43" name="label"/>
+      <p:sp>
+        <p:nvSpPr>
+          <p:cNvPr id="44" name="label"/>
           <p:cNvSpPr txBox="1"/>
           <p:nvPr/>
         </p:nvSpPr>
         <p:spPr>
           <a:xfrm>
-            <a:off x="2395728" y="3090672"/>
+            <a:off x="2395728" y="3236976"/>
             <a:ext cx="1600200" cy="329184"/>
           </a:xfrm>
           <a:prstGeom prst="rect">
@@ -2355,7 +2381,7 @@
                 <a:ea typeface="Calibri" pitchFamily="34" charset="-122"/>
                 <a:cs typeface="Calibri" pitchFamily="34" charset="-120"/>
               </a:rPr>
-              <a:t>Your PC</a:t>
+              <a:t>Phone or PC</a:t>
             </a:r>
             <a:endParaRPr lang="en-US" sz="2000" dirty="0"/>
           </a:p>
@@ -2363,7 +2389,7 @@
       </p:sp>
       <p:sp>
         <p:nvSpPr>
-          <p:cNvPr id="44" name="caption-sub"/>
+          <p:cNvPr id="45" name="caption-sub"/>
           <p:cNvSpPr txBox="1"/>
           <p:nvPr/>
         </p:nvSpPr>
@@ -2402,7 +2428,7 @@
       </p:sp>
       <p:sp>
         <p:nvSpPr>
-          <p:cNvPr id="45" name="Shape 35"/>
+          <p:cNvPr id="46" name="Shape 35"/>
           <p:cNvSpPr/>
           <p:nvPr/>
         </p:nvSpPr>
@@ -2427,7 +2453,7 @@
       </p:sp>
       <p:sp>
         <p:nvSpPr>
-          <p:cNvPr id="46" name="caption-badge"/>
+          <p:cNvPr id="47" name="caption-badge"/>
           <p:cNvSpPr txBox="1"/>
           <p:nvPr/>
         </p:nvSpPr>
@@ -2466,7 +2492,7 @@
       </p:sp>
       <p:sp>
         <p:nvSpPr>
-          <p:cNvPr id="47" name="Shape 37"/>
+          <p:cNvPr id="48" name="Shape 37"/>
           <p:cNvSpPr/>
           <p:nvPr/>
         </p:nvSpPr>
@@ -2505,7 +2531,7 @@
       </p:sp>
       <p:sp>
         <p:nvSpPr>
-          <p:cNvPr id="48" name="caption-arrow"/>
+          <p:cNvPr id="49" name="caption-arrow"/>
           <p:cNvSpPr txBox="1"/>
           <p:nvPr/>
         </p:nvSpPr>
@@ -2544,7 +2570,7 @@
       </p:sp>
       <p:sp>
         <p:nvSpPr>
-          <p:cNvPr id="49" name="Shape 39"/>
+          <p:cNvPr id="50" name="Shape 39"/>
           <p:cNvSpPr/>
           <p:nvPr/>
         </p:nvSpPr>
@@ -2582,7 +2608,7 @@
       </p:sp>
       <p:sp>
         <p:nvSpPr>
-          <p:cNvPr id="50" name="caption-arrow"/>
+          <p:cNvPr id="51" name="caption-arrow"/>
           <p:cNvSpPr txBox="1"/>
           <p:nvPr/>
         </p:nvSpPr>
@@ -2621,7 +2647,7 @@
       </p:sp>
       <p:sp>
         <p:nvSpPr>
-          <p:cNvPr id="51" name="Shape 41"/>
+          <p:cNvPr id="52" name="Shape 41"/>
           <p:cNvSpPr/>
           <p:nvPr/>
         </p:nvSpPr>
@@ -2659,7 +2685,7 @@
       </p:sp>
       <p:sp>
         <p:nvSpPr>
-          <p:cNvPr id="52" name="caption-arrow"/>
+          <p:cNvPr id="53" name="caption-arrow"/>
           <p:cNvSpPr txBox="1"/>
           <p:nvPr/>
         </p:nvSpPr>
@@ -2698,30 +2724,6 @@
       </p:sp>
       <p:pic>
         <p:nvPicPr>
-          <p:cNvPr id="53" name="Image 8" descr="preencoded.png">    </p:cNvPr>
-          <p:cNvPicPr>
-            <a:picLocks noChangeAspect="1"/>
-          </p:cNvPicPr>
-          <p:nvPr/>
-        </p:nvPicPr>
-        <p:blipFill>
-          <a:blip r:embed="rId10"/>
-          <a:stretch>
-            <a:fillRect/>
-          </a:stretch>
-        </p:blipFill>
-        <p:spPr>
-          <a:xfrm>
-            <a:off x="2258568" y="3776472"/>
-            <a:ext cx="256032" cy="256032"/>
-          </a:xfrm>
-          <a:prstGeom prst="rect">
-            <a:avLst/>
-          </a:prstGeom>
-        </p:spPr>
-      </p:pic>
-      <p:pic>
-        <p:nvPicPr>
           <p:cNvPr id="54" name="Image 9" descr="preencoded.png">    </p:cNvPr>
           <p:cNvPicPr>
             <a:picLocks noChangeAspect="1"/>
@@ -2736,6 +2738,30 @@
         </p:blipFill>
         <p:spPr>
           <a:xfrm>
+            <a:off x="2258568" y="3776472"/>
+            <a:ext cx="256032" cy="256032"/>
+          </a:xfrm>
+          <a:prstGeom prst="rect">
+            <a:avLst/>
+          </a:prstGeom>
+        </p:spPr>
+      </p:pic>
+      <p:pic>
+        <p:nvPicPr>
+          <p:cNvPr id="55" name="Image 10" descr="preencoded.png">    </p:cNvPr>
+          <p:cNvPicPr>
+            <a:picLocks noChangeAspect="1"/>
+          </p:cNvPicPr>
+          <p:nvPr/>
+        </p:nvPicPr>
+        <p:blipFill>
+          <a:blip r:embed="rId12"/>
+          <a:stretch>
+            <a:fillRect/>
+          </a:stretch>
+        </p:blipFill>
+        <p:spPr>
+          <a:xfrm>
             <a:off x="10012680" y="566928"/>
             <a:ext cx="868680" cy="868680"/>
           </a:xfrm>
@@ -2746,7 +2772,7 @@
       </p:pic>
       <p:sp>
         <p:nvSpPr>
-          <p:cNvPr id="55" name="label"/>
+          <p:cNvPr id="56" name="label"/>
           <p:cNvSpPr txBox="1"/>
           <p:nvPr/>
         </p:nvSpPr>
@@ -2785,7 +2811,7 @@
       </p:sp>
       <p:sp>
         <p:nvSpPr>
-          <p:cNvPr id="56" name="Shape 44"/>
+          <p:cNvPr id="57" name="Shape 44"/>
           <p:cNvSpPr/>
           <p:nvPr/>
         </p:nvSpPr>
@@ -2810,7 +2836,7 @@
       </p:sp>
       <p:sp>
         <p:nvSpPr>
-          <p:cNvPr id="57" name="caption-badge"/>
+          <p:cNvPr id="58" name="caption-badge"/>
           <p:cNvSpPr txBox="1"/>
           <p:nvPr/>
         </p:nvSpPr>
@@ -2847,16 +2873,64 @@
           </a:p>
         </p:txBody>
       </p:sp>
-      <p:sp>
-        <p:nvSpPr>
-          <p:cNvPr id="58" name="Shape 46"/>
+      <p:pic>
+        <p:nvPicPr>
+          <p:cNvPr id="59" name="Image 11" descr="preencoded.png">    </p:cNvPr>
+          <p:cNvPicPr>
+            <a:picLocks noChangeAspect="1"/>
+          </p:cNvPicPr>
+          <p:nvPr/>
+        </p:nvPicPr>
+        <p:blipFill>
+          <a:blip r:embed="rId13"/>
+          <a:stretch>
+            <a:fillRect/>
+          </a:stretch>
+        </p:blipFill>
+        <p:spPr>
+          <a:xfrm>
+            <a:off x="9390888" y="2377440"/>
+            <a:ext cx="914400" cy="2148840"/>
+          </a:xfrm>
+          <a:prstGeom prst="rect">
+            <a:avLst/>
+          </a:prstGeom>
+        </p:spPr>
+      </p:pic>
+      <p:sp>
+        <p:nvSpPr>
+          <p:cNvPr id="60" name="Shape 46"/>
           <p:cNvSpPr/>
           <p:nvPr/>
         </p:nvSpPr>
         <p:spPr>
           <a:xfrm>
-            <a:off x="9052560" y="1554480"/>
-            <a:ext cx="914400" cy="1975104"/>
+            <a:off x="9390888" y="2377440"/>
+            <a:ext cx="914400" cy="2148840"/>
+          </a:xfrm>
+          <a:prstGeom prst="roundRect">
+            <a:avLst>
+              <a:gd name="adj" fmla="val 10000"/>
+            </a:avLst>
+          </a:prstGeom>
+          <a:ln w="19050">
+            <a:solidFill>
+              <a:srgbClr val="4FC3F7"/>
+            </a:solidFill>
+            <a:prstDash val="solid"/>
+          </a:ln>
+        </p:spPr>
+      </p:sp>
+      <p:sp>
+        <p:nvSpPr>
+          <p:cNvPr id="61" name="Shape 47"/>
+          <p:cNvSpPr/>
+          <p:nvPr/>
+        </p:nvSpPr>
+        <p:spPr>
+          <a:xfrm>
+            <a:off x="9985248" y="1810512"/>
+            <a:ext cx="27432" cy="530352"/>
           </a:xfrm>
           <a:custGeom>
             <a:avLst/>
@@ -2865,15 +2939,13 @@
             <a:cxnLst/>
             <a:rect l="l" t="t" r="r" b="b"/>
             <a:pathLst>
-              <a:path w="914400" h="1975104">
+              <a:path w="27432" h="530352">
                 <a:moveTo>
-                  <a:pt x="0" y="1975104"/>
+                  <a:pt x="0" y="530352"/>
                 </a:moveTo>
-                <a:cubicBezTo>
-                  <a:pt x="45720" y="1188720"/>
-                  <a:pt x="411480" y="274320"/>
-                  <a:pt x="914400" y="0"/>
-                </a:cubicBezTo>
+                <a:lnTo>
+                  <a:pt x="27432" y="0"/>
+                </a:lnTo>
               </a:path>
             </a:pathLst>
           </a:custGeom>
@@ -2889,14 +2961,14 @@
       </p:sp>
       <p:sp>
         <p:nvSpPr>
-          <p:cNvPr id="59" name="caption-arrow"/>
+          <p:cNvPr id="62" name="caption-arrow"/>
           <p:cNvSpPr txBox="1"/>
           <p:nvPr/>
         </p:nvSpPr>
         <p:spPr>
           <a:xfrm>
-            <a:off x="8138160" y="1874520"/>
-            <a:ext cx="1143000" cy="274320"/>
+            <a:off x="8366760" y="1947672"/>
+            <a:ext cx="1280160" cy="274320"/>
           </a:xfrm>
           <a:prstGeom prst="rect">
             <a:avLst/>
@@ -2928,7 +3000,7 @@
       </p:sp>
       <p:sp>
         <p:nvSpPr>
-          <p:cNvPr id="60" name="Shape 48"/>
+          <p:cNvPr id="63" name="Shape 49"/>
           <p:cNvSpPr/>
           <p:nvPr/>
         </p:nvSpPr>
@@ -2968,7 +3040,7 @@
       </p:sp>
       <p:sp>
         <p:nvSpPr>
-          <p:cNvPr id="61" name="caption-arrow"/>
+          <p:cNvPr id="64" name="caption-arrow"/>
           <p:cNvSpPr txBox="1"/>
           <p:nvPr/>
         </p:nvSpPr>
@@ -3007,7 +3079,7 @@
       </p:sp>
       <p:sp>
         <p:nvSpPr>
-          <p:cNvPr id="62" name="Shape 50"/>
+          <p:cNvPr id="65" name="Shape 51"/>
           <p:cNvSpPr/>
           <p:nvPr/>
         </p:nvSpPr>
@@ -3045,7 +3117,7 @@
       </p:sp>
       <p:sp>
         <p:nvSpPr>
-          <p:cNvPr id="63" name="caption-arrow"/>
+          <p:cNvPr id="66" name="caption-arrow"/>
           <p:cNvSpPr txBox="1"/>
           <p:nvPr/>
         </p:nvSpPr>
@@ -3084,14 +3156,14 @@
       </p:sp>
       <p:pic>
         <p:nvPicPr>
-          <p:cNvPr id="64" name="Image 10" descr="preencoded.png">    </p:cNvPr>
+          <p:cNvPr id="67" name="Image 12" descr="preencoded.png">    </p:cNvPr>
           <p:cNvPicPr>
             <a:picLocks noChangeAspect="1"/>
           </p:cNvPicPr>
           <p:nvPr/>
         </p:nvPicPr>
         <p:blipFill>
-          <a:blip r:embed="rId12"/>
+          <a:blip r:embed="rId14"/>
           <a:stretch>
             <a:fillRect/>
           </a:stretch>
@@ -3108,7 +3180,7 @@
       </p:pic>
       <p:sp>
         <p:nvSpPr>
-          <p:cNvPr id="65" name="label"/>
+          <p:cNvPr id="68" name="label"/>
           <p:cNvSpPr txBox="1"/>
           <p:nvPr/>
         </p:nvSpPr>
@@ -3147,7 +3219,7 @@
       </p:sp>
       <p:sp>
         <p:nvSpPr>
-          <p:cNvPr id="66" name="Shape 53"/>
+          <p:cNvPr id="69" name="Shape 54"/>
           <p:cNvSpPr/>
           <p:nvPr/>
         </p:nvSpPr>
@@ -3172,7 +3244,7 @@
       </p:sp>
       <p:sp>
         <p:nvSpPr>
-          <p:cNvPr id="67" name="caption-badge"/>
+          <p:cNvPr id="70" name="caption-badge"/>
           <p:cNvSpPr txBox="1"/>
           <p:nvPr/>
         </p:nvSpPr>
@@ -3211,14 +3283,14 @@
       </p:sp>
       <p:sp>
         <p:nvSpPr>
-          <p:cNvPr id="68" name="Shape 55"/>
+          <p:cNvPr id="71" name="Shape 56"/>
           <p:cNvSpPr/>
           <p:nvPr/>
         </p:nvSpPr>
         <p:spPr>
           <a:xfrm>
             <a:off x="5760720" y="5486400"/>
-            <a:ext cx="2377440" cy="1097280"/>
+            <a:ext cx="2788920" cy="1097280"/>
           </a:xfrm>
           <a:prstGeom prst="roundRect">
             <a:avLst>
@@ -3240,22 +3312,22 @@
       </p:sp>
       <p:pic>
         <p:nvPicPr>
-          <p:cNvPr id="69" name="Image 11" descr="preencoded.png">    </p:cNvPr>
+          <p:cNvPr id="72" name="Image 13" descr="preencoded.png">    </p:cNvPr>
           <p:cNvPicPr>
             <a:picLocks noChangeAspect="1"/>
           </p:cNvPicPr>
           <p:nvPr/>
         </p:nvPicPr>
         <p:blipFill>
-          <a:blip r:embed="rId13"/>
+          <a:blip r:embed="rId15"/>
           <a:stretch>
             <a:fillRect/>
           </a:stretch>
         </p:blipFill>
         <p:spPr>
           <a:xfrm>
-            <a:off x="5897880" y="5788152"/>
-            <a:ext cx="475488" cy="475488"/>
+            <a:off x="5852160" y="5577840"/>
+            <a:ext cx="841248" cy="914400"/>
           </a:xfrm>
           <a:prstGeom prst="rect">
             <a:avLst/>
@@ -3264,14 +3336,14 @@
       </p:pic>
       <p:sp>
         <p:nvSpPr>
-          <p:cNvPr id="70" name="label"/>
+          <p:cNvPr id="73" name="label"/>
           <p:cNvSpPr txBox="1"/>
           <p:nvPr/>
         </p:nvSpPr>
         <p:spPr>
           <a:xfrm>
-            <a:off x="6446520" y="5596128"/>
-            <a:ext cx="1645920" cy="384048"/>
+            <a:off x="6784848" y="5596128"/>
+            <a:ext cx="1691640" cy="384048"/>
           </a:xfrm>
           <a:prstGeom prst="rect">
             <a:avLst/>
@@ -3303,14 +3375,14 @@
       </p:sp>
       <p:sp>
         <p:nvSpPr>
-          <p:cNvPr id="71" name="caption-sub"/>
+          <p:cNvPr id="74" name="caption-sub"/>
           <p:cNvSpPr txBox="1"/>
           <p:nvPr/>
         </p:nvSpPr>
         <p:spPr>
           <a:xfrm>
-            <a:off x="6446520" y="6016752"/>
-            <a:ext cx="1645920" cy="457200"/>
+            <a:off x="6784848" y="6016752"/>
+            <a:ext cx="1691640" cy="457200"/>
           </a:xfrm>
           <a:prstGeom prst="rect">
             <a:avLst/>
@@ -3342,7 +3414,7 @@
       </p:sp>
       <p:sp>
         <p:nvSpPr>
-          <p:cNvPr id="72" name="Shape 58"/>
+          <p:cNvPr id="75" name="Shape 59"/>
           <p:cNvSpPr/>
           <p:nvPr/>
         </p:nvSpPr>
@@ -3367,7 +3439,7 @@
       </p:sp>
       <p:sp>
         <p:nvSpPr>
-          <p:cNvPr id="73" name="caption-badge"/>
+          <p:cNvPr id="76" name="caption-badge"/>
           <p:cNvSpPr txBox="1"/>
           <p:nvPr/>
         </p:nvSpPr>
@@ -3406,14 +3478,14 @@
       </p:sp>
       <p:sp>
         <p:nvSpPr>
-          <p:cNvPr id="74" name="Shape 60"/>
+          <p:cNvPr id="77" name="Shape 61"/>
           <p:cNvSpPr/>
           <p:nvPr/>
         </p:nvSpPr>
         <p:spPr>
           <a:xfrm>
-            <a:off x="8174736" y="6053328"/>
-            <a:ext cx="374904" cy="18288"/>
+            <a:off x="8586216" y="6053328"/>
+            <a:ext cx="786384" cy="18288"/>
           </a:xfrm>
           <a:custGeom>
             <a:avLst/>
@@ -3422,9 +3494,9 @@
             <a:cxnLst/>
             <a:rect l="l" t="t" r="r" b="b"/>
             <a:pathLst>
-              <a:path w="374904" h="18288">
+              <a:path w="786384" h="18288">
                 <a:moveTo>
-                  <a:pt x="374904" y="0"/>
+                  <a:pt x="786384" y="0"/>
                 </a:moveTo>
                 <a:lnTo>
                   <a:pt x="0" y="0"/>
@@ -3444,14 +3516,14 @@
       </p:sp>
       <p:sp>
         <p:nvSpPr>
-          <p:cNvPr id="75" name="caption-arrow"/>
+          <p:cNvPr id="78" name="caption-arrow"/>
           <p:cNvSpPr txBox="1"/>
           <p:nvPr/>
         </p:nvSpPr>
         <p:spPr>
           <a:xfrm>
-            <a:off x="8229600" y="6382512"/>
-            <a:ext cx="1188720" cy="274320"/>
+            <a:off x="8595360" y="6382512"/>
+            <a:ext cx="777240" cy="274320"/>
           </a:xfrm>
           <a:prstGeom prst="rect">
             <a:avLst/>
@@ -3483,7 +3555,7 @@
       </p:sp>
       <p:sp>
         <p:nvSpPr>
-          <p:cNvPr id="76" name="Shape 62"/>
+          <p:cNvPr id="79" name="Shape 63"/>
           <p:cNvSpPr/>
           <p:nvPr/>
         </p:nvSpPr>
@@ -3521,7 +3593,7 @@
       </p:sp>
       <p:sp>
         <p:nvSpPr>
-          <p:cNvPr id="77" name="caption-arrow"/>
+          <p:cNvPr id="80" name="caption-arrow"/>
           <p:cNvSpPr txBox="1"/>
           <p:nvPr/>
         </p:nvSpPr>
@@ -3560,7 +3632,7 @@
       </p:sp>
       <p:sp>
         <p:nvSpPr>
-          <p:cNvPr id="78" name="Shape 64"/>
+          <p:cNvPr id="81" name="Shape 65"/>
           <p:cNvSpPr/>
           <p:nvPr/>
         </p:nvSpPr>
@@ -3601,7 +3673,7 @@
       </p:sp>
       <p:sp>
         <p:nvSpPr>
-          <p:cNvPr id="79" name="caption-arrow"/>
+          <p:cNvPr id="82" name="caption-arrow"/>
           <p:cNvSpPr txBox="1"/>
           <p:nvPr/>
         </p:nvSpPr>
@@ -3640,14 +3712,14 @@
       </p:sp>
       <p:pic>
         <p:nvPicPr>
-          <p:cNvPr id="80" name="Image 12" descr="preencoded.png">    </p:cNvPr>
+          <p:cNvPr id="83" name="Image 14" descr="preencoded.png">    </p:cNvPr>
           <p:cNvPicPr>
             <a:picLocks noChangeAspect="1"/>
           </p:cNvPicPr>
           <p:nvPr/>
         </p:nvPicPr>
         <p:blipFill>
-          <a:blip r:embed="rId14"/>
+          <a:blip r:embed="rId16"/>
           <a:stretch>
             <a:fillRect/>
           </a:stretch>
@@ -3664,7 +3736,7 @@
       </p:pic>
       <p:sp>
         <p:nvSpPr>
-          <p:cNvPr id="81" name="Shape 66"/>
+          <p:cNvPr id="84" name="Shape 67"/>
           <p:cNvSpPr/>
           <p:nvPr/>
         </p:nvSpPr>
@@ -3688,7 +3760,7 @@
       </p:sp>
       <p:sp>
         <p:nvSpPr>
-          <p:cNvPr id="82" name="caption-legend"/>
+          <p:cNvPr id="85" name="caption-legend"/>
           <p:cNvSpPr txBox="1"/>
           <p:nvPr/>
         </p:nvSpPr>
@@ -3727,7 +3799,7 @@
       </p:sp>
       <p:sp>
         <p:nvSpPr>
-          <p:cNvPr id="83" name="Shape 68"/>
+          <p:cNvPr id="86" name="Shape 69"/>
           <p:cNvSpPr/>
           <p:nvPr/>
         </p:nvSpPr>
@@ -3751,7 +3823,7 @@
       </p:sp>
       <p:sp>
         <p:nvSpPr>
-          <p:cNvPr id="84" name="caption-legend"/>
+          <p:cNvPr id="87" name="caption-legend"/>
           <p:cNvSpPr txBox="1"/>
           <p:nvPr/>
         </p:nvSpPr>
@@ -3790,7 +3862,7 @@
       </p:sp>
       <p:sp>
         <p:nvSpPr>
-          <p:cNvPr id="85" name="Shape 70"/>
+          <p:cNvPr id="88" name="Shape 71"/>
           <p:cNvSpPr/>
           <p:nvPr/>
         </p:nvSpPr>
@@ -3814,7 +3886,7 @@
       </p:sp>
       <p:sp>
         <p:nvSpPr>
-          <p:cNvPr id="86" name="caption-legend"/>
+          <p:cNvPr id="89" name="caption-legend"/>
           <p:cNvSpPr txBox="1"/>
           <p:nvPr/>
         </p:nvSpPr>
@@ -3853,7 +3925,7 @@
       </p:sp>
       <p:sp>
         <p:nvSpPr>
-          <p:cNvPr id="87" name="Shape 72"/>
+          <p:cNvPr id="90" name="Shape 73"/>
           <p:cNvSpPr/>
           <p:nvPr/>
         </p:nvSpPr>
@@ -3877,7 +3949,7 @@
       </p:sp>
       <p:sp>
         <p:nvSpPr>
-          <p:cNvPr id="88" name="caption-legend"/>
+          <p:cNvPr id="91" name="caption-legend"/>
           <p:cNvSpPr txBox="1"/>
           <p:nvPr/>
         </p:nvSpPr>

--- a/ai-diagram-slide.pptx
+++ b/ai-diagram-slide.pptx
@@ -568,13 +568,7 @@
           <a:p>
             <a:r>
               <a:rPr lang="en-US" dirty="0"/>
-              <a:t>About the cooling-tower photo: big round towers like this one are mostly at power plants. Data-center cooling towers are smaller boxes, but they work the same way: water evaporates and carries the heat away.</a:t>
-            </a:r>
-          </a:p>
-          <a:p>
-            <a:r>
-              <a:rPr lang="en-US" dirty="0"/>
-              <a:t>Photos: our team's pictures of a phone, server racks (behind the data center), a cooling tower and a desalination plant.</a:t>
+              <a:t>Photos: our team's pictures of a phone, server racks (behind the data center) and a desalination plant.</a:t>
             </a:r>
           </a:p>
         </p:txBody>
@@ -2873,64 +2867,16 @@
           </a:p>
         </p:txBody>
       </p:sp>
-      <p:pic>
-        <p:nvPicPr>
-          <p:cNvPr id="59" name="Image 11" descr="preencoded.png">    </p:cNvPr>
-          <p:cNvPicPr>
-            <a:picLocks noChangeAspect="1"/>
-          </p:cNvPicPr>
-          <p:nvPr/>
-        </p:nvPicPr>
-        <p:blipFill>
-          <a:blip r:embed="rId13"/>
-          <a:stretch>
-            <a:fillRect/>
-          </a:stretch>
-        </p:blipFill>
-        <p:spPr>
-          <a:xfrm>
-            <a:off x="9390888" y="2377440"/>
-            <a:ext cx="914400" cy="2148840"/>
-          </a:xfrm>
-          <a:prstGeom prst="rect">
-            <a:avLst/>
-          </a:prstGeom>
-        </p:spPr>
-      </p:pic>
-      <p:sp>
-        <p:nvSpPr>
-          <p:cNvPr id="60" name="Shape 46"/>
+      <p:sp>
+        <p:nvSpPr>
+          <p:cNvPr id="59" name="Shape 46"/>
           <p:cNvSpPr/>
           <p:nvPr/>
         </p:nvSpPr>
         <p:spPr>
           <a:xfrm>
-            <a:off x="9390888" y="2377440"/>
-            <a:ext cx="914400" cy="2148840"/>
-          </a:xfrm>
-          <a:prstGeom prst="roundRect">
-            <a:avLst>
-              <a:gd name="adj" fmla="val 10000"/>
-            </a:avLst>
-          </a:prstGeom>
-          <a:ln w="19050">
-            <a:solidFill>
-              <a:srgbClr val="4FC3F7"/>
-            </a:solidFill>
-            <a:prstDash val="solid"/>
-          </a:ln>
-        </p:spPr>
-      </p:sp>
-      <p:sp>
-        <p:nvSpPr>
-          <p:cNvPr id="61" name="Shape 47"/>
-          <p:cNvSpPr/>
-          <p:nvPr/>
-        </p:nvSpPr>
-        <p:spPr>
-          <a:xfrm>
-            <a:off x="9985248" y="1810512"/>
-            <a:ext cx="27432" cy="530352"/>
+            <a:off x="9052560" y="1554480"/>
+            <a:ext cx="914400" cy="1975104"/>
           </a:xfrm>
           <a:custGeom>
             <a:avLst/>
@@ -2939,13 +2885,15 @@
             <a:cxnLst/>
             <a:rect l="l" t="t" r="r" b="b"/>
             <a:pathLst>
-              <a:path w="27432" h="530352">
+              <a:path w="914400" h="1975104">
                 <a:moveTo>
-                  <a:pt x="0" y="530352"/>
+                  <a:pt x="0" y="1975104"/>
                 </a:moveTo>
-                <a:lnTo>
-                  <a:pt x="27432" y="0"/>
-                </a:lnTo>
+                <a:cubicBezTo>
+                  <a:pt x="45720" y="1188720"/>
+                  <a:pt x="411480" y="274320"/>
+                  <a:pt x="914400" y="0"/>
+                </a:cubicBezTo>
               </a:path>
             </a:pathLst>
           </a:custGeom>
@@ -2961,14 +2909,14 @@
       </p:sp>
       <p:sp>
         <p:nvSpPr>
-          <p:cNvPr id="62" name="caption-arrow"/>
+          <p:cNvPr id="60" name="caption-arrow"/>
           <p:cNvSpPr txBox="1"/>
           <p:nvPr/>
         </p:nvSpPr>
         <p:spPr>
           <a:xfrm>
-            <a:off x="8366760" y="1947672"/>
-            <a:ext cx="1280160" cy="274320"/>
+            <a:off x="8138160" y="1874520"/>
+            <a:ext cx="1143000" cy="274320"/>
           </a:xfrm>
           <a:prstGeom prst="rect">
             <a:avLst/>
@@ -3000,7 +2948,7 @@
       </p:sp>
       <p:sp>
         <p:nvSpPr>
-          <p:cNvPr id="63" name="Shape 49"/>
+          <p:cNvPr id="61" name="Shape 48"/>
           <p:cNvSpPr/>
           <p:nvPr/>
         </p:nvSpPr>
@@ -3040,7 +2988,7 @@
       </p:sp>
       <p:sp>
         <p:nvSpPr>
-          <p:cNvPr id="64" name="caption-arrow"/>
+          <p:cNvPr id="62" name="caption-arrow"/>
           <p:cNvSpPr txBox="1"/>
           <p:nvPr/>
         </p:nvSpPr>
@@ -3079,7 +3027,7 @@
       </p:sp>
       <p:sp>
         <p:nvSpPr>
-          <p:cNvPr id="65" name="Shape 51"/>
+          <p:cNvPr id="63" name="Shape 50"/>
           <p:cNvSpPr/>
           <p:nvPr/>
         </p:nvSpPr>
@@ -3117,7 +3065,7 @@
       </p:sp>
       <p:sp>
         <p:nvSpPr>
-          <p:cNvPr id="66" name="caption-arrow"/>
+          <p:cNvPr id="64" name="caption-arrow"/>
           <p:cNvSpPr txBox="1"/>
           <p:nvPr/>
         </p:nvSpPr>
@@ -3156,14 +3104,14 @@
       </p:sp>
       <p:pic>
         <p:nvPicPr>
-          <p:cNvPr id="67" name="Image 12" descr="preencoded.png">    </p:cNvPr>
+          <p:cNvPr id="65" name="Image 11" descr="preencoded.png">    </p:cNvPr>
           <p:cNvPicPr>
             <a:picLocks noChangeAspect="1"/>
           </p:cNvPicPr>
           <p:nvPr/>
         </p:nvPicPr>
         <p:blipFill>
-          <a:blip r:embed="rId14"/>
+          <a:blip r:embed="rId13"/>
           <a:stretch>
             <a:fillRect/>
           </a:stretch>
@@ -3180,7 +3128,7 @@
       </p:pic>
       <p:sp>
         <p:nvSpPr>
-          <p:cNvPr id="68" name="label"/>
+          <p:cNvPr id="66" name="label"/>
           <p:cNvSpPr txBox="1"/>
           <p:nvPr/>
         </p:nvSpPr>
@@ -3219,7 +3167,7 @@
       </p:sp>
       <p:sp>
         <p:nvSpPr>
-          <p:cNvPr id="69" name="Shape 54"/>
+          <p:cNvPr id="67" name="Shape 53"/>
           <p:cNvSpPr/>
           <p:nvPr/>
         </p:nvSpPr>
@@ -3244,7 +3192,7 @@
       </p:sp>
       <p:sp>
         <p:nvSpPr>
-          <p:cNvPr id="70" name="caption-badge"/>
+          <p:cNvPr id="68" name="caption-badge"/>
           <p:cNvSpPr txBox="1"/>
           <p:nvPr/>
         </p:nvSpPr>
@@ -3283,7 +3231,7 @@
       </p:sp>
       <p:sp>
         <p:nvSpPr>
-          <p:cNvPr id="71" name="Shape 56"/>
+          <p:cNvPr id="69" name="Shape 55"/>
           <p:cNvSpPr/>
           <p:nvPr/>
         </p:nvSpPr>
@@ -3312,14 +3260,14 @@
       </p:sp>
       <p:pic>
         <p:nvPicPr>
-          <p:cNvPr id="72" name="Image 13" descr="preencoded.png">    </p:cNvPr>
+          <p:cNvPr id="70" name="Image 12" descr="preencoded.png">    </p:cNvPr>
           <p:cNvPicPr>
             <a:picLocks noChangeAspect="1"/>
           </p:cNvPicPr>
           <p:nvPr/>
         </p:nvPicPr>
         <p:blipFill>
-          <a:blip r:embed="rId15"/>
+          <a:blip r:embed="rId14"/>
           <a:stretch>
             <a:fillRect/>
           </a:stretch>
@@ -3336,7 +3284,7 @@
       </p:pic>
       <p:sp>
         <p:nvSpPr>
-          <p:cNvPr id="73" name="label"/>
+          <p:cNvPr id="71" name="label"/>
           <p:cNvSpPr txBox="1"/>
           <p:nvPr/>
         </p:nvSpPr>
@@ -3375,7 +3323,7 @@
       </p:sp>
       <p:sp>
         <p:nvSpPr>
-          <p:cNvPr id="74" name="caption-sub"/>
+          <p:cNvPr id="72" name="caption-sub"/>
           <p:cNvSpPr txBox="1"/>
           <p:nvPr/>
         </p:nvSpPr>
@@ -3414,7 +3362,7 @@
       </p:sp>
       <p:sp>
         <p:nvSpPr>
-          <p:cNvPr id="75" name="Shape 59"/>
+          <p:cNvPr id="73" name="Shape 58"/>
           <p:cNvSpPr/>
           <p:nvPr/>
         </p:nvSpPr>
@@ -3439,7 +3387,7 @@
       </p:sp>
       <p:sp>
         <p:nvSpPr>
-          <p:cNvPr id="76" name="caption-badge"/>
+          <p:cNvPr id="74" name="caption-badge"/>
           <p:cNvSpPr txBox="1"/>
           <p:nvPr/>
         </p:nvSpPr>
@@ -3478,7 +3426,7 @@
       </p:sp>
       <p:sp>
         <p:nvSpPr>
-          <p:cNvPr id="77" name="Shape 61"/>
+          <p:cNvPr id="75" name="Shape 60"/>
           <p:cNvSpPr/>
           <p:nvPr/>
         </p:nvSpPr>
@@ -3516,7 +3464,7 @@
       </p:sp>
       <p:sp>
         <p:nvSpPr>
-          <p:cNvPr id="78" name="caption-arrow"/>
+          <p:cNvPr id="76" name="caption-arrow"/>
           <p:cNvSpPr txBox="1"/>
           <p:nvPr/>
         </p:nvSpPr>
@@ -3555,7 +3503,7 @@
       </p:sp>
       <p:sp>
         <p:nvSpPr>
-          <p:cNvPr id="79" name="Shape 63"/>
+          <p:cNvPr id="77" name="Shape 62"/>
           <p:cNvSpPr/>
           <p:nvPr/>
         </p:nvSpPr>
@@ -3593,7 +3541,7 @@
       </p:sp>
       <p:sp>
         <p:nvSpPr>
-          <p:cNvPr id="80" name="caption-arrow"/>
+          <p:cNvPr id="78" name="caption-arrow"/>
           <p:cNvSpPr txBox="1"/>
           <p:nvPr/>
         </p:nvSpPr>
@@ -3632,7 +3580,7 @@
       </p:sp>
       <p:sp>
         <p:nvSpPr>
-          <p:cNvPr id="81" name="Shape 65"/>
+          <p:cNvPr id="79" name="Shape 64"/>
           <p:cNvSpPr/>
           <p:nvPr/>
         </p:nvSpPr>
@@ -3673,7 +3621,7 @@
       </p:sp>
       <p:sp>
         <p:nvSpPr>
-          <p:cNvPr id="82" name="caption-arrow"/>
+          <p:cNvPr id="80" name="caption-arrow"/>
           <p:cNvSpPr txBox="1"/>
           <p:nvPr/>
         </p:nvSpPr>
@@ -3712,14 +3660,14 @@
       </p:sp>
       <p:pic>
         <p:nvPicPr>
-          <p:cNvPr id="83" name="Image 14" descr="preencoded.png">    </p:cNvPr>
+          <p:cNvPr id="81" name="Image 13" descr="preencoded.png">    </p:cNvPr>
           <p:cNvPicPr>
             <a:picLocks noChangeAspect="1"/>
           </p:cNvPicPr>
           <p:nvPr/>
         </p:nvPicPr>
         <p:blipFill>
-          <a:blip r:embed="rId16"/>
+          <a:blip r:embed="rId15"/>
           <a:stretch>
             <a:fillRect/>
           </a:stretch>
@@ -3736,7 +3684,7 @@
       </p:pic>
       <p:sp>
         <p:nvSpPr>
-          <p:cNvPr id="84" name="Shape 67"/>
+          <p:cNvPr id="82" name="Shape 66"/>
           <p:cNvSpPr/>
           <p:nvPr/>
         </p:nvSpPr>
@@ -3760,7 +3708,7 @@
       </p:sp>
       <p:sp>
         <p:nvSpPr>
-          <p:cNvPr id="85" name="caption-legend"/>
+          <p:cNvPr id="83" name="caption-legend"/>
           <p:cNvSpPr txBox="1"/>
           <p:nvPr/>
         </p:nvSpPr>
@@ -3799,7 +3747,7 @@
       </p:sp>
       <p:sp>
         <p:nvSpPr>
-          <p:cNvPr id="86" name="Shape 69"/>
+          <p:cNvPr id="84" name="Shape 68"/>
           <p:cNvSpPr/>
           <p:nvPr/>
         </p:nvSpPr>
@@ -3823,7 +3771,7 @@
       </p:sp>
       <p:sp>
         <p:nvSpPr>
-          <p:cNvPr id="87" name="caption-legend"/>
+          <p:cNvPr id="85" name="caption-legend"/>
           <p:cNvSpPr txBox="1"/>
           <p:nvPr/>
         </p:nvSpPr>
@@ -3862,7 +3810,7 @@
       </p:sp>
       <p:sp>
         <p:nvSpPr>
-          <p:cNvPr id="88" name="Shape 71"/>
+          <p:cNvPr id="86" name="Shape 70"/>
           <p:cNvSpPr/>
           <p:nvPr/>
         </p:nvSpPr>
@@ -3886,7 +3834,7 @@
       </p:sp>
       <p:sp>
         <p:nvSpPr>
-          <p:cNvPr id="89" name="caption-legend"/>
+          <p:cNvPr id="87" name="caption-legend"/>
           <p:cNvSpPr txBox="1"/>
           <p:nvPr/>
         </p:nvSpPr>
@@ -3925,7 +3873,7 @@
       </p:sp>
       <p:sp>
         <p:nvSpPr>
-          <p:cNvPr id="90" name="Shape 73"/>
+          <p:cNvPr id="88" name="Shape 72"/>
           <p:cNvSpPr/>
           <p:nvPr/>
         </p:nvSpPr>
@@ -3949,7 +3897,7 @@
       </p:sp>
       <p:sp>
         <p:nvSpPr>
-          <p:cNvPr id="91" name="caption-legend"/>
+          <p:cNvPr id="89" name="caption-legend"/>
           <p:cNvSpPr txBox="1"/>
           <p:nvPr/>
         </p:nvSpPr>

--- a/ai-diagram-slide.pptx
+++ b/ai-diagram-slide.pptx
@@ -568,7 +568,13 @@
           <a:p>
             <a:r>
               <a:rPr lang="en-US" dirty="0"/>
-              <a:t>Photos: our team's pictures of a phone, server racks (behind the data center) and a desalination plant.</a:t>
+              <a:t>Photos: our team's pictures of a dam, wind turbines (power plant), a phone, server racks (behind the data center) and a desalination plant.</a:t>
+            </a:r>
+          </a:p>
+          <a:p>
+            <a:r>
+              <a:rPr lang="en-US" dirty="0"/>
+              <a:t>Wind turbines are spun by wind, not water, and use almost no water to make electricity. That is one way to make AI's power less thirsty.</a:t>
             </a:r>
           </a:p>
         </p:txBody>
@@ -2032,38 +2038,9 @@
           </a:p>
         </p:txBody>
       </p:sp>
-      <p:sp>
-        <p:nvSpPr>
-          <p:cNvPr id="34" name="Shape 26"/>
-          <p:cNvSpPr/>
-          <p:nvPr/>
-        </p:nvSpPr>
-        <p:spPr>
-          <a:xfrm>
-            <a:off x="320040" y="1097280"/>
-            <a:ext cx="1828800" cy="1234440"/>
-          </a:xfrm>
-          <a:prstGeom prst="roundRect">
-            <a:avLst>
-              <a:gd name="adj" fmla="val 8889"/>
-            </a:avLst>
-          </a:prstGeom>
-          <a:solidFill>
-            <a:srgbClr val="0E1B2A">
-              <a:alpha val="90000"/>
-            </a:srgbClr>
-          </a:solidFill>
-          <a:ln w="19050">
-            <a:solidFill>
-              <a:srgbClr val="4FC3F7"/>
-            </a:solidFill>
-            <a:prstDash val="solid"/>
-          </a:ln>
-        </p:spPr>
-      </p:sp>
       <p:pic>
         <p:nvPicPr>
-          <p:cNvPr id="35" name="Image 6" descr="preencoded.png">    </p:cNvPr>
+          <p:cNvPr id="34" name="Image 6" descr="preencoded.png">    </p:cNvPr>
           <p:cNvPicPr>
             <a:picLocks noChangeAspect="1"/>
           </p:cNvPicPr>
@@ -2077,14 +2054,38 @@
         </p:blipFill>
         <p:spPr>
           <a:xfrm>
-            <a:off x="1024128" y="1188720"/>
-            <a:ext cx="420624" cy="420624"/>
+            <a:off x="320040" y="1097280"/>
+            <a:ext cx="1828800" cy="1234440"/>
           </a:xfrm>
           <a:prstGeom prst="rect">
             <a:avLst/>
           </a:prstGeom>
         </p:spPr>
       </p:pic>
+      <p:sp>
+        <p:nvSpPr>
+          <p:cNvPr id="35" name="Shape 26"/>
+          <p:cNvSpPr/>
+          <p:nvPr/>
+        </p:nvSpPr>
+        <p:spPr>
+          <a:xfrm>
+            <a:off x="320040" y="1097280"/>
+            <a:ext cx="1828800" cy="1234440"/>
+          </a:xfrm>
+          <a:prstGeom prst="roundRect">
+            <a:avLst>
+              <a:gd name="adj" fmla="val 8889"/>
+            </a:avLst>
+          </a:prstGeom>
+          <a:ln w="19050">
+            <a:solidFill>
+              <a:srgbClr val="4FC3F7"/>
+            </a:solidFill>
+            <a:prstDash val="solid"/>
+          </a:ln>
+        </p:spPr>
+      </p:sp>
       <p:sp>
         <p:nvSpPr>
           <p:cNvPr id="36" name="label"/>
@@ -2093,7 +2094,7 @@
         </p:nvSpPr>
         <p:spPr>
           <a:xfrm>
-            <a:off x="320040" y="1627632"/>
+            <a:off x="320040" y="1581912"/>
             <a:ext cx="1828800" cy="329184"/>
           </a:xfrm>
           <a:prstGeom prst="rect">
@@ -2101,6 +2102,13 @@
           </a:prstGeom>
           <a:noFill/>
           <a:ln/>
+          <a:effectLst>
+            <a:outerShdw sx="100000" sy="100000" kx="0" ky="0" algn="bl" rotWithShape="0" blurRad="76200" dist="19050" dir="5400000">
+              <a:srgbClr val="000000">
+                <a:alpha val="70000"/>
+              </a:srgbClr>
+            </a:outerShdw>
+          </a:effectLst>
         </p:spPr>
         <p:txBody>
           <a:bodyPr wrap="square" lIns="0" tIns="0" rIns="0" bIns="0" rtlCol="0" anchor="ctr"/>
@@ -2132,17 +2140,24 @@
         </p:nvSpPr>
         <p:spPr>
           <a:xfrm>
-            <a:off x="393192" y="1965960"/>
-            <a:ext cx="1682496" cy="320040"/>
+            <a:off x="393192" y="1901952"/>
+            <a:ext cx="1682496" cy="402336"/>
           </a:xfrm>
           <a:prstGeom prst="rect">
             <a:avLst/>
           </a:prstGeom>
           <a:noFill/>
           <a:ln/>
-        </p:spPr>
-        <p:txBody>
-          <a:bodyPr wrap="square" lIns="0" tIns="0" rIns="0" bIns="0" rtlCol="0" anchor="t"/>
+          <a:effectLst>
+            <a:outerShdw sx="100000" sy="100000" kx="0" ky="0" algn="bl" rotWithShape="0" blurRad="76200" dist="19050" dir="5400000">
+              <a:srgbClr val="000000">
+                <a:alpha val="70000"/>
+              </a:srgbClr>
+            </a:outerShdw>
+          </a:effectLst>
+        </p:spPr>
+        <p:txBody>
+          <a:bodyPr wrap="square" lIns="0" tIns="0" rIns="0" bIns="0" rtlCol="0" anchor="ctr"/>
           <a:lstStyle/>
           <a:p>
             <a:pPr algn="ctr" indent="0" marL="0">
@@ -2163,38 +2178,9 @@
           </a:p>
         </p:txBody>
       </p:sp>
-      <p:sp>
-        <p:nvSpPr>
-          <p:cNvPr id="38" name="Shape 29"/>
-          <p:cNvSpPr/>
-          <p:nvPr/>
-        </p:nvSpPr>
-        <p:spPr>
-          <a:xfrm>
-            <a:off x="320040" y="3291840"/>
-            <a:ext cx="1828800" cy="1353312"/>
-          </a:xfrm>
-          <a:prstGeom prst="roundRect">
-            <a:avLst>
-              <a:gd name="adj" fmla="val 8108"/>
-            </a:avLst>
-          </a:prstGeom>
-          <a:solidFill>
-            <a:srgbClr val="0E1B2A">
-              <a:alpha val="90000"/>
-            </a:srgbClr>
-          </a:solidFill>
-          <a:ln w="19050">
-            <a:solidFill>
-              <a:srgbClr val="F2A33A"/>
-            </a:solidFill>
-            <a:prstDash val="solid"/>
-          </a:ln>
-        </p:spPr>
-      </p:sp>
       <p:pic>
         <p:nvPicPr>
-          <p:cNvPr id="39" name="Image 7" descr="preencoded.png">    </p:cNvPr>
+          <p:cNvPr id="38" name="Image 7" descr="preencoded.png">    </p:cNvPr>
           <p:cNvPicPr>
             <a:picLocks noChangeAspect="1"/>
           </p:cNvPicPr>
@@ -2208,14 +2194,38 @@
         </p:blipFill>
         <p:spPr>
           <a:xfrm>
-            <a:off x="1024128" y="3383280"/>
-            <a:ext cx="420624" cy="420624"/>
+            <a:off x="320040" y="3291840"/>
+            <a:ext cx="1828800" cy="1353312"/>
           </a:xfrm>
           <a:prstGeom prst="rect">
             <a:avLst/>
           </a:prstGeom>
         </p:spPr>
       </p:pic>
+      <p:sp>
+        <p:nvSpPr>
+          <p:cNvPr id="39" name="Shape 29"/>
+          <p:cNvSpPr/>
+          <p:nvPr/>
+        </p:nvSpPr>
+        <p:spPr>
+          <a:xfrm>
+            <a:off x="320040" y="3291840"/>
+            <a:ext cx="1828800" cy="1353312"/>
+          </a:xfrm>
+          <a:prstGeom prst="roundRect">
+            <a:avLst>
+              <a:gd name="adj" fmla="val 8108"/>
+            </a:avLst>
+          </a:prstGeom>
+          <a:ln w="19050">
+            <a:solidFill>
+              <a:srgbClr val="F2A33A"/>
+            </a:solidFill>
+            <a:prstDash val="solid"/>
+          </a:ln>
+        </p:spPr>
+      </p:sp>
       <p:sp>
         <p:nvSpPr>
           <p:cNvPr id="40" name="label"/>
@@ -2224,7 +2234,7 @@
         </p:nvSpPr>
         <p:spPr>
           <a:xfrm>
-            <a:off x="320040" y="3822192"/>
+            <a:off x="320040" y="3895344"/>
             <a:ext cx="1828800" cy="329184"/>
           </a:xfrm>
           <a:prstGeom prst="rect">
@@ -2232,6 +2242,13 @@
           </a:prstGeom>
           <a:noFill/>
           <a:ln/>
+          <a:effectLst>
+            <a:outerShdw sx="100000" sy="100000" kx="0" ky="0" algn="bl" rotWithShape="0" blurRad="76200" dist="19050" dir="5400000">
+              <a:srgbClr val="000000">
+                <a:alpha val="70000"/>
+              </a:srgbClr>
+            </a:outerShdw>
+          </a:effectLst>
         </p:spPr>
         <p:txBody>
           <a:bodyPr wrap="square" lIns="0" tIns="0" rIns="0" bIns="0" rtlCol="0" anchor="ctr"/>
@@ -2263,17 +2280,24 @@
         </p:nvSpPr>
         <p:spPr>
           <a:xfrm>
-            <a:off x="393192" y="4160520"/>
-            <a:ext cx="1682496" cy="438912"/>
+            <a:off x="393192" y="4215384"/>
+            <a:ext cx="1682496" cy="402336"/>
           </a:xfrm>
           <a:prstGeom prst="rect">
             <a:avLst/>
           </a:prstGeom>
           <a:noFill/>
           <a:ln/>
-        </p:spPr>
-        <p:txBody>
-          <a:bodyPr wrap="square" lIns="0" tIns="0" rIns="0" bIns="0" rtlCol="0" anchor="t"/>
+          <a:effectLst>
+            <a:outerShdw sx="100000" sy="100000" kx="0" ky="0" algn="bl" rotWithShape="0" blurRad="76200" dist="19050" dir="5400000">
+              <a:srgbClr val="000000">
+                <a:alpha val="70000"/>
+              </a:srgbClr>
+            </a:outerShdw>
+          </a:effectLst>
+        </p:spPr>
+        <p:txBody>
+          <a:bodyPr wrap="square" lIns="0" tIns="0" rIns="0" bIns="0" rtlCol="0" anchor="ctr"/>
           <a:lstStyle/>
           <a:p>
             <a:pPr algn="ctr" indent="0" marL="0">
@@ -2288,7 +2312,7 @@
                 <a:ea typeface="Calibri" pitchFamily="34" charset="-122"/>
                 <a:cs typeface="Calibri" pitchFamily="34" charset="-120"/>
               </a:rPr>
-              <a:t>Falling water or steam spins a turbine</a:t>
+              <a:t>Wind, falling water or steam spins a turbine</a:t>
             </a:r>
             <a:endParaRPr lang="en-US" sz="1300" dirty="0"/>
           </a:p>

--- a/ai-diagram-slide.pptx
+++ b/ai-diagram-slide.pptx
@@ -568,13 +568,13 @@
           <a:p>
             <a:r>
               <a:rPr lang="en-US" dirty="0"/>
-              <a:t>Photos: our team's pictures of a dam, wind turbines (power plant), a phone, server racks (behind the data center) and a desalination plant.</a:t>
+              <a:t>Photos: our team's pictures of a dam, a steam power plant with its cooling tower, a phone, server racks (behind the data center) and a desalination plant.</a:t>
             </a:r>
           </a:p>
           <a:p>
             <a:r>
               <a:rPr lang="en-US" dirty="0"/>
-              <a:t>Wind turbines are spun by wind, not water, and use almost no water to make electricity. That is one way to make AI's power less thirsty.</a:t>
+              <a:t>The power plant photo shows a steam plant: it burns fuel to boil water, the steam spins the turbine, and the big cooling tower evaporates water. That evaporated water is the off-site water from Slide 2.</a:t>
             </a:r>
           </a:p>
         </p:txBody>
@@ -2312,7 +2312,7 @@
                 <a:ea typeface="Calibri" pitchFamily="34" charset="-122"/>
                 <a:cs typeface="Calibri" pitchFamily="34" charset="-120"/>
               </a:rPr>
-              <a:t>Wind, falling water or steam spins a turbine</a:t>
+              <a:t>Falling water or steam spins a turbine</a:t>
             </a:r>
             <a:endParaRPr lang="en-US" sz="1300" dirty="0"/>
           </a:p>

--- a/ai-diagram-slide.pptx
+++ b/ai-diagram-slide.pptx
@@ -568,7 +568,7 @@
           <a:p>
             <a:r>
               <a:rPr lang="en-US" dirty="0"/>
-              <a:t>Photos: our team's pictures of a dam, a steam power plant with its cooling tower, a phone, server racks (behind the data center) and a desalination plant.</a:t>
+              <a:t>Photos: our team's pictures of a dam, a hydro power plant (a drawing: water from the dam spins the turbine), a phone, server racks (behind the data center) and a desalination plant.</a:t>
             </a:r>
           </a:p>
           <a:p>
@@ -2178,9 +2178,38 @@
           </a:p>
         </p:txBody>
       </p:sp>
+      <p:sp>
+        <p:nvSpPr>
+          <p:cNvPr id="38" name="Shape 29"/>
+          <p:cNvSpPr/>
+          <p:nvPr/>
+        </p:nvSpPr>
+        <p:spPr>
+          <a:xfrm>
+            <a:off x="320040" y="2880360"/>
+            <a:ext cx="1828800" cy="2340864"/>
+          </a:xfrm>
+          <a:prstGeom prst="roundRect">
+            <a:avLst>
+              <a:gd name="adj" fmla="val 6000"/>
+            </a:avLst>
+          </a:prstGeom>
+          <a:solidFill>
+            <a:srgbClr val="0E1B2A">
+              <a:alpha val="90000"/>
+            </a:srgbClr>
+          </a:solidFill>
+          <a:ln w="19050">
+            <a:solidFill>
+              <a:srgbClr val="F2A33A"/>
+            </a:solidFill>
+            <a:prstDash val="solid"/>
+          </a:ln>
+        </p:spPr>
+      </p:sp>
       <p:pic>
         <p:nvPicPr>
-          <p:cNvPr id="38" name="Image 7" descr="preencoded.png">    </p:cNvPr>
+          <p:cNvPr id="39" name="Image 7" descr="preencoded.png">    </p:cNvPr>
           <p:cNvPicPr>
             <a:picLocks noChangeAspect="1"/>
           </p:cNvPicPr>
@@ -2194,38 +2223,14 @@
         </p:blipFill>
         <p:spPr>
           <a:xfrm>
-            <a:off x="320040" y="3291840"/>
-            <a:ext cx="1828800" cy="1353312"/>
+            <a:off x="393192" y="2953512"/>
+            <a:ext cx="1682496" cy="1554480"/>
           </a:xfrm>
           <a:prstGeom prst="rect">
             <a:avLst/>
           </a:prstGeom>
         </p:spPr>
       </p:pic>
-      <p:sp>
-        <p:nvSpPr>
-          <p:cNvPr id="39" name="Shape 29"/>
-          <p:cNvSpPr/>
-          <p:nvPr/>
-        </p:nvSpPr>
-        <p:spPr>
-          <a:xfrm>
-            <a:off x="320040" y="3291840"/>
-            <a:ext cx="1828800" cy="1353312"/>
-          </a:xfrm>
-          <a:prstGeom prst="roundRect">
-            <a:avLst>
-              <a:gd name="adj" fmla="val 8108"/>
-            </a:avLst>
-          </a:prstGeom>
-          <a:ln w="19050">
-            <a:solidFill>
-              <a:srgbClr val="F2A33A"/>
-            </a:solidFill>
-            <a:prstDash val="solid"/>
-          </a:ln>
-        </p:spPr>
-      </p:sp>
       <p:sp>
         <p:nvSpPr>
           <p:cNvPr id="40" name="label"/>
@@ -2234,7 +2239,7 @@
         </p:nvSpPr>
         <p:spPr>
           <a:xfrm>
-            <a:off x="320040" y="3895344"/>
+            <a:off x="320040" y="4544568"/>
             <a:ext cx="1828800" cy="329184"/>
           </a:xfrm>
           <a:prstGeom prst="rect">
@@ -2242,13 +2247,6 @@
           </a:prstGeom>
           <a:noFill/>
           <a:ln/>
-          <a:effectLst>
-            <a:outerShdw sx="100000" sy="100000" kx="0" ky="0" algn="bl" rotWithShape="0" blurRad="76200" dist="19050" dir="5400000">
-              <a:srgbClr val="000000">
-                <a:alpha val="70000"/>
-              </a:srgbClr>
-            </a:outerShdw>
-          </a:effectLst>
         </p:spPr>
         <p:txBody>
           <a:bodyPr wrap="square" lIns="0" tIns="0" rIns="0" bIns="0" rtlCol="0" anchor="ctr"/>
@@ -2280,21 +2278,14 @@
         </p:nvSpPr>
         <p:spPr>
           <a:xfrm>
-            <a:off x="393192" y="4215384"/>
-            <a:ext cx="1682496" cy="402336"/>
+            <a:off x="393192" y="4846320"/>
+            <a:ext cx="1682496" cy="347472"/>
           </a:xfrm>
           <a:prstGeom prst="rect">
             <a:avLst/>
           </a:prstGeom>
           <a:noFill/>
           <a:ln/>
-          <a:effectLst>
-            <a:outerShdw sx="100000" sy="100000" kx="0" ky="0" algn="bl" rotWithShape="0" blurRad="76200" dist="19050" dir="5400000">
-              <a:srgbClr val="000000">
-                <a:alpha val="70000"/>
-              </a:srgbClr>
-            </a:outerShdw>
-          </a:effectLst>
         </p:spPr>
         <p:txBody>
           <a:bodyPr wrap="square" lIns="0" tIns="0" rIns="0" bIns="0" rtlCol="0" anchor="ctr"/>
@@ -2595,7 +2586,7 @@
         <p:spPr>
           <a:xfrm>
             <a:off x="1234440" y="2368296"/>
-            <a:ext cx="18288" cy="886968"/>
+            <a:ext cx="18288" cy="475488"/>
           </a:xfrm>
           <a:custGeom>
             <a:avLst/>
@@ -2604,12 +2595,12 @@
             <a:cxnLst/>
             <a:rect l="l" t="t" r="r" b="b"/>
             <a:pathLst>
-              <a:path w="18288" h="886968">
+              <a:path w="18288" h="475488">
                 <a:moveTo>
                   <a:pt x="0" y="0"/>
                 </a:moveTo>
                 <a:lnTo>
-                  <a:pt x="0" y="886968"/>
+                  <a:pt x="0" y="475488"/>
                 </a:lnTo>
               </a:path>
             </a:pathLst>
@@ -2632,8 +2623,8 @@
         </p:nvSpPr>
         <p:spPr>
           <a:xfrm>
-            <a:off x="1325880" y="2670048"/>
-            <a:ext cx="1051560" cy="274320"/>
+            <a:off x="137160" y="2487168"/>
+            <a:ext cx="1024128" cy="274320"/>
           </a:xfrm>
           <a:prstGeom prst="rect">
             <a:avLst/>
@@ -2645,7 +2636,7 @@
           <a:bodyPr wrap="square" lIns="0" tIns="0" rIns="0" bIns="0" rtlCol="0" anchor="ctr"/>
           <a:lstStyle/>
           <a:p>
-            <a:pPr algn="l" indent="0" marL="0">
+            <a:pPr algn="r" indent="0" marL="0">
               <a:buNone/>
             </a:pPr>
             <a:r>
@@ -3610,8 +3601,8 @@
         </p:nvSpPr>
         <p:spPr>
           <a:xfrm>
-            <a:off x="1234440" y="4681728"/>
-            <a:ext cx="4489704" cy="1353312"/>
+            <a:off x="1234440" y="5257800"/>
+            <a:ext cx="4489704" cy="777240"/>
           </a:xfrm>
           <a:custGeom>
             <a:avLst/>
@@ -3620,15 +3611,15 @@
             <a:cxnLst/>
             <a:rect l="l" t="t" r="r" b="b"/>
             <a:pathLst>
-              <a:path w="4489704" h="1353312">
+              <a:path w="4489704" h="777240">
                 <a:moveTo>
                   <a:pt x="0" y="0"/>
                 </a:moveTo>
                 <a:lnTo>
-                  <a:pt x="0" y="1353312"/>
+                  <a:pt x="0" y="777240"/>
                 </a:lnTo>
                 <a:lnTo>
-                  <a:pt x="4489704" y="1353312"/>
+                  <a:pt x="4489704" y="777240"/>
                 </a:lnTo>
               </a:path>
             </a:pathLst>
